--- a/AetherGuard(2210991999, 2210991988, 2210992041, 2210991311)/reports/AetherGuard_Forensic_PPT.pptx
+++ b/AetherGuard(2210991999, 2210991988, 2210992041, 2210991311)/reports/AetherGuard_Forensic_PPT.pptx
@@ -223,7 +223,7 @@
           <a:p>
             <a:fld id="{6E7CA002-7A07-4C77-B65A-DC99F4DBBEBE}" type="datetimeFigureOut">
               <a:rPr lang="en-IN" smtClean="0"/>
-              <a:t>26-04-2026</a:t>
+              <a:t>28-04-2026</a:t>
             </a:fld>
             <a:endParaRPr lang="en-IN"/>
           </a:p>
@@ -684,7 +684,7 @@
             <a:fld id="{1D5BB0C6-8FC1-47C0-B737-D54E21B5B868}" type="datetimeFigureOut">
               <a:rPr lang="en-US" smtClean="0"/>
               <a:pPr/>
-              <a:t>4/26/2026</a:t>
+              <a:t>4/28/2026</a:t>
             </a:fld>
             <a:endParaRPr lang="en-US"/>
           </a:p>
@@ -1101,7 +1101,7 @@
             <a:fld id="{1D5BB0C6-8FC1-47C0-B737-D54E21B5B868}" type="datetimeFigureOut">
               <a:rPr lang="en-US" smtClean="0"/>
               <a:pPr/>
-              <a:t>4/26/2026</a:t>
+              <a:t>4/28/2026</a:t>
             </a:fld>
             <a:endParaRPr lang="en-US"/>
           </a:p>
@@ -1204,7 +1204,7 @@
             <a:fld id="{1D5BB0C6-8FC1-47C0-B737-D54E21B5B868}" type="datetimeFigureOut">
               <a:rPr lang="en-US" smtClean="0"/>
               <a:pPr/>
-              <a:t>4/26/2026</a:t>
+              <a:t>4/28/2026</a:t>
             </a:fld>
             <a:endParaRPr lang="en-US"/>
           </a:p>
@@ -1441,7 +1441,7 @@
             <a:fld id="{1D5BB0C6-8FC1-47C0-B737-D54E21B5B868}" type="datetimeFigureOut">
               <a:rPr lang="en-US" smtClean="0"/>
               <a:pPr/>
-              <a:t>4/26/2026</a:t>
+              <a:t>4/28/2026</a:t>
             </a:fld>
             <a:endParaRPr lang="en-US"/>
           </a:p>
@@ -2279,7 +2279,7 @@
         <p:spPr>
           <a:xfrm>
             <a:off x="0" y="1484784"/>
-            <a:ext cx="9144000" cy="5386090"/>
+            <a:ext cx="9144000" cy="4893647"/>
           </a:xfrm>
           <a:prstGeom prst="rect">
             <a:avLst/>
@@ -2306,10 +2306,13 @@
           </a:p>
           <a:p>
             <a:pPr algn="ctr"/>
-            <a:endParaRPr lang="en-US" sz="2000" b="1" dirty="0">
-              <a:latin typeface="Times New Roman" panose="02020603050405020304" pitchFamily="18" charset="0"/>
-              <a:cs typeface="Times New Roman" panose="02020603050405020304" pitchFamily="18" charset="0"/>
-            </a:endParaRPr>
+            <a:r>
+              <a:rPr lang="en-US" sz="2000" b="1" dirty="0">
+                <a:latin typeface="Times New Roman" panose="02020603050405020304" pitchFamily="18" charset="0"/>
+                <a:cs typeface="Times New Roman" panose="02020603050405020304" pitchFamily="18" charset="0"/>
+              </a:rPr>
+              <a:t>Nitin(2210991999)</a:t>
+            </a:r>
           </a:p>
           <a:p>
             <a:pPr algn="ctr"/>
@@ -2372,10 +2375,15 @@
                 <a:latin typeface="Times New Roman" panose="02020603050405020304" pitchFamily="18" charset="0"/>
                 <a:cs typeface="Times New Roman" panose="02020603050405020304" pitchFamily="18" charset="0"/>
               </a:rPr>
-              <a:t>Supervised by : Dr. Rajat Takkar</a:t>
-            </a:r>
-          </a:p>
-          <a:p>
+              <a:t>Supervised by : Dr. Shikha </a:t>
+            </a:r>
+            <a:r>
+              <a:rPr lang="en-US" sz="2000" b="1" dirty="0" err="1">
+                <a:latin typeface="Times New Roman" panose="02020603050405020304" pitchFamily="18" charset="0"/>
+                <a:cs typeface="Times New Roman" panose="02020603050405020304" pitchFamily="18" charset="0"/>
+              </a:rPr>
+              <a:t>tuteja</a:t>
+            </a:r>
             <a:endParaRPr lang="en-US" sz="2000" b="1" dirty="0">
               <a:solidFill>
                 <a:srgbClr val="FF0000"/>
@@ -3508,11 +3516,11 @@
   <p:clrMapOvr>
     <a:masterClrMapping/>
   </p:clrMapOvr>
-  <mc:AlternateContent xmlns:mc="http://schemas.openxmlformats.org/markup-compatibility/2006">
-    <mc:Choice xmlns:p14="http://schemas.microsoft.com/office/powerpoint/2010/main" Requires="p14">
+  <mc:AlternateContent xmlns:mc="http://schemas.openxmlformats.org/markup-compatibility/2006" xmlns:p14="http://schemas.microsoft.com/office/powerpoint/2010/main">
+    <mc:Choice Requires="p14">
       <p:transition p14:dur="0" advTm="4000"/>
     </mc:Choice>
-    <mc:Fallback>
+    <mc:Fallback xmlns="">
       <p:transition advTm="4000"/>
     </mc:Fallback>
   </mc:AlternateContent>
@@ -3794,11 +3802,11 @@
   <p:clrMapOvr>
     <a:masterClrMapping/>
   </p:clrMapOvr>
-  <mc:AlternateContent xmlns:mc="http://schemas.openxmlformats.org/markup-compatibility/2006">
-    <mc:Choice xmlns:p14="http://schemas.microsoft.com/office/powerpoint/2010/main" Requires="p14">
+  <mc:AlternateContent xmlns:mc="http://schemas.openxmlformats.org/markup-compatibility/2006" xmlns:p14="http://schemas.microsoft.com/office/powerpoint/2010/main">
+    <mc:Choice Requires="p14">
       <p:transition p14:dur="0" advTm="4000"/>
     </mc:Choice>
-    <mc:Fallback>
+    <mc:Fallback xmlns="">
       <p:transition advTm="4000"/>
     </mc:Fallback>
   </mc:AlternateContent>
@@ -4130,8 +4138,8 @@
             </a:pPr>
             <a:r>
               <a:rPr lang="en-US" sz="2000" dirty="0">
-                <a:latin typeface="Times New Roman" panose="02020603050405020304" pitchFamily="18" charset="0"/>
-                <a:cs typeface="Times New Roman" panose="02020603050405020304" pitchFamily="18" charset="0"/>
+                <a:latin typeface="Times New Roman" pitchFamily="18" charset="0"/>
+                <a:cs typeface="Times New Roman" pitchFamily="18" charset="0"/>
               </a:rPr>
               <a:t>Results and Output</a:t>
             </a:r>
@@ -4143,8 +4151,8 @@
             </a:pPr>
             <a:r>
               <a:rPr lang="en-US" sz="2000" dirty="0">
-                <a:latin typeface="Times New Roman" panose="02020603050405020304" pitchFamily="18" charset="0"/>
-                <a:cs typeface="Times New Roman" panose="02020603050405020304" pitchFamily="18" charset="0"/>
+                <a:latin typeface="Times New Roman" pitchFamily="18" charset="0"/>
+                <a:cs typeface="Times New Roman" pitchFamily="18" charset="0"/>
               </a:rPr>
               <a:t>Key Findings</a:t>
             </a:r>
@@ -4156,8 +4164,8 @@
             </a:pPr>
             <a:r>
               <a:rPr lang="en-US" sz="2000" dirty="0">
-                <a:latin typeface="Times New Roman" panose="02020603050405020304" pitchFamily="18" charset="0"/>
-                <a:cs typeface="Times New Roman" panose="02020603050405020304" pitchFamily="18" charset="0"/>
+                <a:latin typeface="Times New Roman" pitchFamily="18" charset="0"/>
+                <a:cs typeface="Times New Roman" pitchFamily="18" charset="0"/>
               </a:rPr>
               <a:t>Conclusion</a:t>
             </a:r>
@@ -4169,8 +4177,8 @@
             </a:pPr>
             <a:r>
               <a:rPr lang="en-US" sz="2000" dirty="0">
-                <a:latin typeface="Times New Roman" panose="02020603050405020304" pitchFamily="18" charset="0"/>
-                <a:cs typeface="Times New Roman" panose="02020603050405020304" pitchFamily="18" charset="0"/>
+                <a:latin typeface="Times New Roman" pitchFamily="18" charset="0"/>
+                <a:cs typeface="Times New Roman" pitchFamily="18" charset="0"/>
               </a:rPr>
               <a:t>Challenges Faced</a:t>
             </a:r>
@@ -4182,8 +4190,8 @@
             </a:pPr>
             <a:r>
               <a:rPr lang="en-US" sz="2000" dirty="0">
-                <a:latin typeface="Times New Roman" panose="02020603050405020304" pitchFamily="18" charset="0"/>
-                <a:cs typeface="Times New Roman" panose="02020603050405020304" pitchFamily="18" charset="0"/>
+                <a:latin typeface="Times New Roman" pitchFamily="18" charset="0"/>
+                <a:cs typeface="Times New Roman" pitchFamily="18" charset="0"/>
               </a:rPr>
               <a:t>Future Scope</a:t>
             </a:r>
